--- a/dist/초1/수학/수와연산/초1_수학_수와연산_08_세수의덧셈과뺄셈_학생용.pptx
+++ b/dist/초1/수학/수와연산/초1_수학_수와연산_08_세수의덧셈과뺄셈_학생용.pptx
@@ -119,13 +119,13 @@
   <p:extLst>
     <p:ext uri="{521415D9-36F7-43E2-AB2F-B90AF26B5E84}">
       <p14:sectionLst xmlns:p14="http://schemas.microsoft.com/office/powerpoint/2010/main">
-        <p14:section name="도입" id="{e737df61-e9b6-011b-28fa-a6832a3c2f3d}">
+        <p14:section name="도입" id="{76d55233-a698-45dd-1311-da3ff9cc1e36}">
           <p14:sldIdLst>
             <p14:sldId id="256"/>
             <p14:sldId id="257"/>
           </p14:sldIdLst>
         </p14:section>
-        <p14:section name="개념" id="{5e98505b-eaca-f85a-2cfc-2d6cfa4e81bc}">
+        <p14:section name="개념" id="{4b6da6c5-e1d5-f46b-5555-c545571336a4}">
           <p14:sldIdLst>
             <p14:sldId id="258"/>
             <p14:sldId id="259"/>
@@ -133,25 +133,25 @@
             <p14:sldId id="261"/>
           </p14:sldIdLst>
         </p14:section>
-        <p14:section name="연습" id="{9bf84ad9-5981-10ee-8fa7-0de26a1f8cff}">
+        <p14:section name="연습" id="{0c4e0c17-97ea-bcf3-65c9-ac466a555a1e}">
           <p14:sldIdLst>
             <p14:sldId id="262"/>
             <p14:sldId id="263"/>
             <p14:sldId id="264"/>
           </p14:sldIdLst>
         </p14:section>
-        <p14:section name="확인" id="{64131e1f-8b7a-7715-8fe8-4d5551170602}">
+        <p14:section name="확인" id="{daecee9b-9810-acec-4346-61169ff33f6d}">
           <p14:sldIdLst>
             <p14:sldId id="265"/>
             <p14:sldId id="266"/>
           </p14:sldIdLst>
         </p14:section>
-        <p14:section name="정리" id="{dc297de4-1d89-a6e3-8d88-150b5f812e28}">
+        <p14:section name="정리" id="{107790fa-a331-2e23-9a18-3266d10b6ecc}">
           <p14:sldIdLst>
             <p14:sldId id="267"/>
           </p14:sldIdLst>
         </p14:section>
-        <p14:section name="보충" id="{aaf825f7-c288-fdb0-5453-05af891885eb}">
+        <p14:section name="보충" id="{74669834-f83d-2f22-4e17-dccb5d8a2deb}">
           <p14:sldIdLst>
             <p14:sldId id="268"/>
           </p14:sldIdLst>

--- a/dist/초1/수학/수와연산/초1_수학_수와연산_08_세수의덧셈과뺄셈_학생용.pptx
+++ b/dist/초1/수학/수와연산/초1_수학_수와연산_08_세수의덧셈과뺄셈_학생용.pptx
@@ -119,13 +119,13 @@
   <p:extLst>
     <p:ext uri="{521415D9-36F7-43E2-AB2F-B90AF26B5E84}">
       <p14:sectionLst xmlns:p14="http://schemas.microsoft.com/office/powerpoint/2010/main">
-        <p14:section name="도입" id="{76d55233-a698-45dd-1311-da3ff9cc1e36}">
+        <p14:section name="도입" id="{db46b792-2648-4544-7c7c-44e218abf6c2}">
           <p14:sldIdLst>
             <p14:sldId id="256"/>
             <p14:sldId id="257"/>
           </p14:sldIdLst>
         </p14:section>
-        <p14:section name="개념" id="{4b6da6c5-e1d5-f46b-5555-c545571336a4}">
+        <p14:section name="개념" id="{e2dbe050-dbe3-1fec-3356-ea68642102c4}">
           <p14:sldIdLst>
             <p14:sldId id="258"/>
             <p14:sldId id="259"/>
@@ -133,25 +133,25 @@
             <p14:sldId id="261"/>
           </p14:sldIdLst>
         </p14:section>
-        <p14:section name="연습" id="{0c4e0c17-97ea-bcf3-65c9-ac466a555a1e}">
+        <p14:section name="연습" id="{be0bedb5-4667-ca07-1b79-748b9eb550ca}">
           <p14:sldIdLst>
             <p14:sldId id="262"/>
             <p14:sldId id="263"/>
             <p14:sldId id="264"/>
           </p14:sldIdLst>
         </p14:section>
-        <p14:section name="확인" id="{daecee9b-9810-acec-4346-61169ff33f6d}">
+        <p14:section name="확인" id="{c9815c2a-180b-55c1-cf3e-f88f4a176a9e}">
           <p14:sldIdLst>
             <p14:sldId id="265"/>
             <p14:sldId id="266"/>
           </p14:sldIdLst>
         </p14:section>
-        <p14:section name="정리" id="{107790fa-a331-2e23-9a18-3266d10b6ecc}">
+        <p14:section name="정리" id="{421d776b-104c-5351-2b4b-488849f03402}">
           <p14:sldIdLst>
             <p14:sldId id="267"/>
           </p14:sldIdLst>
         </p14:section>
-        <p14:section name="보충" id="{74669834-f83d-2f22-4e17-dccb5d8a2deb}">
+        <p14:section name="보충" id="{3ed48040-cf68-88d4-6f62-f632c525d7a4}">
           <p14:sldIdLst>
             <p14:sldId id="268"/>
           </p14:sldIdLst>

--- a/dist/초1/수학/수와연산/초1_수학_수와연산_08_세수의덧셈과뺄셈_학생용.pptx
+++ b/dist/초1/수학/수와연산/초1_수학_수와연산_08_세수의덧셈과뺄셈_학생용.pptx
@@ -119,13 +119,13 @@
   <p:extLst>
     <p:ext uri="{521415D9-36F7-43E2-AB2F-B90AF26B5E84}">
       <p14:sectionLst xmlns:p14="http://schemas.microsoft.com/office/powerpoint/2010/main">
-        <p14:section name="도입" id="{db46b792-2648-4544-7c7c-44e218abf6c2}">
+        <p14:section name="도입" id="{33b0fe8f-c326-9440-afcc-8b305ae7f970}">
           <p14:sldIdLst>
             <p14:sldId id="256"/>
             <p14:sldId id="257"/>
           </p14:sldIdLst>
         </p14:section>
-        <p14:section name="개념" id="{e2dbe050-dbe3-1fec-3356-ea68642102c4}">
+        <p14:section name="개념" id="{4e1570be-8acb-cf5a-4a10-72393f2ce15a}">
           <p14:sldIdLst>
             <p14:sldId id="258"/>
             <p14:sldId id="259"/>
@@ -133,25 +133,25 @@
             <p14:sldId id="261"/>
           </p14:sldIdLst>
         </p14:section>
-        <p14:section name="연습" id="{be0bedb5-4667-ca07-1b79-748b9eb550ca}">
+        <p14:section name="연습" id="{ad226fc7-86ed-0443-ac80-0db28616a4a7}">
           <p14:sldIdLst>
             <p14:sldId id="262"/>
             <p14:sldId id="263"/>
             <p14:sldId id="264"/>
           </p14:sldIdLst>
         </p14:section>
-        <p14:section name="확인" id="{c9815c2a-180b-55c1-cf3e-f88f4a176a9e}">
+        <p14:section name="확인" id="{c10c65ac-ace6-bbf2-4a86-84cfe7556950}">
           <p14:sldIdLst>
             <p14:sldId id="265"/>
             <p14:sldId id="266"/>
           </p14:sldIdLst>
         </p14:section>
-        <p14:section name="정리" id="{421d776b-104c-5351-2b4b-488849f03402}">
+        <p14:section name="정리" id="{81e7d4cf-1d9a-6557-943e-1bc4ffd596f5}">
           <p14:sldIdLst>
             <p14:sldId id="267"/>
           </p14:sldIdLst>
         </p14:section>
-        <p14:section name="보충" id="{3ed48040-cf68-88d4-6f62-f632c525d7a4}">
+        <p14:section name="보충" id="{006047cf-d290-e514-20c3-19e4d84c9bfa}">
           <p14:sldIdLst>
             <p14:sldId id="268"/>
           </p14:sldIdLst>
